--- a/output/run_2026-06-08_002/deck.pptx
+++ b/output/run_2026-06-08_002/deck.pptx
@@ -6,7 +6,6 @@
   </p:sldMasterIdLst>
   <p:sldIdLst>
     <p:sldId id="256" r:id="rId7"/>
-    <p:sldId id="257" r:id="rId8"/>
   </p:sldIdLst>
   <p:sldSz cx="12191695" cy="6858000" type="screen4x3"/>
   <p:notesSz cx="6858000" cy="9144000"/>
@@ -4586,316 +4585,6 @@
             <a:avLst/>
           </a:prstGeom>
           <a:solidFill>
-            <a:srgbClr val="071D49"/>
-          </a:solidFill>
-          <a:ln>
-            <a:noFill/>
-          </a:ln>
-          <a:effectLst/>
-        </p:spPr>
-        <p:style>
-          <a:lnRef idx="1">
-            <a:schemeClr val="accent1"/>
-          </a:lnRef>
-          <a:fillRef idx="3">
-            <a:schemeClr val="accent1"/>
-          </a:fillRef>
-          <a:effectRef idx="2">
-            <a:schemeClr val="accent1"/>
-          </a:effectRef>
-          <a:fontRef idx="minor">
-            <a:schemeClr val="lt1"/>
-          </a:fontRef>
-        </p:style>
-        <p:txBody>
-          <a:bodyPr rtlCol="0" anchor="ctr"/>
-          <a:lstStyle/>
-          <a:p>
-            <a:pPr algn="ctr"/>
-          </a:p>
-        </p:txBody>
-      </p:sp>
-      <p:sp>
-        <p:nvSpPr>
-          <p:cNvPr id="3" name="Rectangle 2"/>
-          <p:cNvSpPr/>
-          <p:nvPr/>
-        </p:nvSpPr>
-        <p:spPr>
-          <a:xfrm>
-            <a:off x="411480" y="2331720"/>
-            <a:ext cx="822960" cy="82296"/>
-          </a:xfrm>
-          <a:prstGeom prst="rect">
-            <a:avLst/>
-          </a:prstGeom>
-          <a:solidFill>
-            <a:srgbClr val="E40D62"/>
-          </a:solidFill>
-          <a:ln>
-            <a:noFill/>
-          </a:ln>
-          <a:effectLst/>
-        </p:spPr>
-        <p:style>
-          <a:lnRef idx="1">
-            <a:schemeClr val="accent1"/>
-          </a:lnRef>
-          <a:fillRef idx="3">
-            <a:schemeClr val="accent1"/>
-          </a:fillRef>
-          <a:effectRef idx="2">
-            <a:schemeClr val="accent1"/>
-          </a:effectRef>
-          <a:fontRef idx="minor">
-            <a:schemeClr val="lt1"/>
-          </a:fontRef>
-        </p:style>
-        <p:txBody>
-          <a:bodyPr rtlCol="0" anchor="ctr"/>
-          <a:lstStyle/>
-          <a:p>
-            <a:pPr algn="ctr"/>
-          </a:p>
-        </p:txBody>
-      </p:sp>
-      <p:sp>
-        <p:nvSpPr>
-          <p:cNvPr id="4" name="TextBox 3"/>
-          <p:cNvSpPr txBox="1"/>
-          <p:nvPr/>
-        </p:nvSpPr>
-        <p:spPr>
-          <a:xfrm>
-            <a:off x="411480" y="1463040"/>
-            <a:ext cx="7315200" cy="365760"/>
-          </a:xfrm>
-          <a:prstGeom prst="rect">
-            <a:avLst/>
-          </a:prstGeom>
-          <a:noFill/>
-        </p:spPr>
-        <p:txBody>
-          <a:bodyPr wrap="square" anchor="t" lIns="0" rIns="0" tIns="0" bIns="0">
-            <a:spAutoFit/>
-          </a:bodyPr>
-          <a:lstStyle/>
-          <a:p>
-            <a:pPr algn="l">
-              <a:lnSpc>
-                <a:spcPct val="100000"/>
-              </a:lnSpc>
-            </a:pPr>
-            <a:r>
-              <a:rPr sz="1400" b="1" i="0">
-                <a:solidFill>
-                  <a:srgbClr val="07B2AC"/>
-                </a:solidFill>
-                <a:latin typeface="Montserrat Medium"/>
-              </a:rPr>
-              <a:t>SKYRIZI · IBD MARKET</a:t>
-            </a:r>
-          </a:p>
-        </p:txBody>
-      </p:sp>
-      <p:sp>
-        <p:nvSpPr>
-          <p:cNvPr id="5" name="TextBox 4"/>
-          <p:cNvSpPr txBox="1"/>
-          <p:nvPr/>
-        </p:nvSpPr>
-        <p:spPr>
-          <a:xfrm>
-            <a:off x="411480" y="2560320"/>
-            <a:ext cx="10515600" cy="2011680"/>
-          </a:xfrm>
-          <a:prstGeom prst="rect">
-            <a:avLst/>
-          </a:prstGeom>
-          <a:noFill/>
-        </p:spPr>
-        <p:txBody>
-          <a:bodyPr wrap="square" anchor="t" lIns="0" rIns="0" tIns="0" bIns="0">
-            <a:spAutoFit/>
-          </a:bodyPr>
-          <a:lstStyle/>
-          <a:p>
-            <a:pPr algn="l">
-              <a:lnSpc>
-                <a:spcPct val="100000"/>
-              </a:lnSpc>
-            </a:pPr>
-            <a:r>
-              <a:rPr sz="4600" b="1" i="0">
-                <a:solidFill>
-                  <a:srgbClr val="FFFFFF"/>
-                </a:solidFill>
-                <a:latin typeface="Montserrat Medium"/>
-              </a:rPr>
-              <a:t>Skyrizi (SQ + IV + OBI) IBD Performance</a:t>
-            </a:r>
-          </a:p>
-        </p:txBody>
-      </p:sp>
-      <p:sp>
-        <p:nvSpPr>
-          <p:cNvPr id="6" name="TextBox 5"/>
-          <p:cNvSpPr txBox="1"/>
-          <p:nvPr/>
-        </p:nvSpPr>
-        <p:spPr>
-          <a:xfrm>
-            <a:off x="429768" y="4114800"/>
-            <a:ext cx="10058400" cy="731520"/>
-          </a:xfrm>
-          <a:prstGeom prst="rect">
-            <a:avLst/>
-          </a:prstGeom>
-          <a:noFill/>
-        </p:spPr>
-        <p:txBody>
-          <a:bodyPr wrap="square" anchor="t" lIns="0" rIns="0" tIns="0" bIns="0">
-            <a:spAutoFit/>
-          </a:bodyPr>
-          <a:lstStyle/>
-          <a:p>
-            <a:pPr algn="l">
-              <a:lnSpc>
-                <a:spcPct val="100000"/>
-              </a:lnSpc>
-            </a:pPr>
-            <a:r>
-              <a:rPr sz="1800" b="0" i="1">
-                <a:solidFill>
-                  <a:srgbClr val="D9DEE8"/>
-                </a:solidFill>
-                <a:latin typeface="Roboto"/>
-              </a:rPr>
-              <a:t>Weekly TRx split by indication (UC / CD), full series</a:t>
-            </a:r>
-          </a:p>
-        </p:txBody>
-      </p:sp>
-      <p:sp>
-        <p:nvSpPr>
-          <p:cNvPr id="7" name="TextBox 6"/>
-          <p:cNvSpPr txBox="1"/>
-          <p:nvPr/>
-        </p:nvSpPr>
-        <p:spPr>
-          <a:xfrm>
-            <a:off x="411480" y="6437376"/>
-            <a:ext cx="3657600" cy="274320"/>
-          </a:xfrm>
-          <a:prstGeom prst="rect">
-            <a:avLst/>
-          </a:prstGeom>
-          <a:noFill/>
-        </p:spPr>
-        <p:txBody>
-          <a:bodyPr wrap="square" anchor="t" lIns="0" rIns="0" tIns="0" bIns="0">
-            <a:spAutoFit/>
-          </a:bodyPr>
-          <a:lstStyle/>
-          <a:p>
-            <a:pPr algn="l">
-              <a:lnSpc>
-                <a:spcPct val="100000"/>
-              </a:lnSpc>
-            </a:pPr>
-            <a:r>
-              <a:rPr sz="1100" b="1" i="0">
-                <a:solidFill>
-                  <a:srgbClr val="E40D62"/>
-                </a:solidFill>
-                <a:latin typeface="Montserrat Medium"/>
-              </a:rPr>
-              <a:t>▶ </a:t>
-            </a:r>
-            <a:r>
-              <a:rPr sz="1100" b="1" i="0">
-                <a:solidFill>
-                  <a:srgbClr val="FFFFFF"/>
-                </a:solidFill>
-                <a:latin typeface="Montserrat Medium"/>
-              </a:rPr>
-              <a:t>DataZymes</a:t>
-            </a:r>
-          </a:p>
-        </p:txBody>
-      </p:sp>
-      <p:sp>
-        <p:nvSpPr>
-          <p:cNvPr id="8" name="TextBox 7"/>
-          <p:cNvSpPr txBox="1"/>
-          <p:nvPr/>
-        </p:nvSpPr>
-        <p:spPr>
-          <a:xfrm>
-            <a:off x="11338560" y="6437376"/>
-            <a:ext cx="457200" cy="274320"/>
-          </a:xfrm>
-          <a:prstGeom prst="rect">
-            <a:avLst/>
-          </a:prstGeom>
-          <a:noFill/>
-        </p:spPr>
-        <p:txBody>
-          <a:bodyPr wrap="square" anchor="t" lIns="0" rIns="0" tIns="0" bIns="0">
-            <a:spAutoFit/>
-          </a:bodyPr>
-          <a:lstStyle/>
-          <a:p>
-            <a:pPr algn="r">
-              <a:lnSpc>
-                <a:spcPct val="100000"/>
-              </a:lnSpc>
-            </a:pPr>
-            <a:r>
-              <a:rPr sz="1100" b="0" i="0">
-                <a:solidFill>
-                  <a:srgbClr val="FFFFFF"/>
-                </a:solidFill>
-                <a:latin typeface="Roboto"/>
-              </a:rPr>
-              <a:t>9</a:t>
-            </a:r>
-          </a:p>
-        </p:txBody>
-      </p:sp>
-    </p:spTree>
-  </p:cSld>
-  <p:clrMapOvr>
-    <a:masterClrMapping/>
-  </p:clrMapOvr>
-</p:sld>
-</file>
-
-<file path=ppt/slides/slide2.xml><?xml version="1.0" encoding="utf-8"?>
-<p:sld xmlns:a="http://schemas.openxmlformats.org/drawingml/2006/main" xmlns:p="http://schemas.openxmlformats.org/presentationml/2006/main" xmlns:r="http://schemas.openxmlformats.org/officeDocument/2006/relationships">
-  <p:cSld>
-    <p:spTree>
-      <p:nvGrpSpPr>
-        <p:cNvPr id="1" name=""/>
-        <p:cNvGrpSpPr/>
-        <p:nvPr/>
-      </p:nvGrpSpPr>
-      <p:grpSpPr/>
-      <p:sp>
-        <p:nvSpPr>
-          <p:cNvPr id="2" name="Rectangle 1"/>
-          <p:cNvSpPr/>
-          <p:nvPr/>
-        </p:nvSpPr>
-        <p:spPr>
-          <a:xfrm>
-            <a:off x="0" y="0"/>
-            <a:ext cx="12191695" cy="6858000"/>
-          </a:xfrm>
-          <a:prstGeom prst="rect">
-            <a:avLst/>
-          </a:prstGeom>
-          <a:solidFill>
             <a:srgbClr val="FFFFFF"/>
           </a:solidFill>
           <a:ln>
@@ -5751,7 +5440,7 @@
                 </a:solidFill>
                 <a:latin typeface="Roboto"/>
               </a:rPr>
-              <a:t>10</a:t>
+              <a:t>1</a:t>
             </a:r>
           </a:p>
         </p:txBody>

--- a/output/run_2026-06-08_002/deck.pptx
+++ b/output/run_2026-06-08_002/deck.pptx
@@ -142,9 +142,9 @@
           </c:marker>
           <c:cat>
             <c:strRef>
-              <c:f>Sheet1!$A$2:$A$107</c:f>
+              <c:f>Sheet1!$A$2:$A$115</c:f>
               <c:strCache>
-                <c:ptCount val="106"/>
+                <c:ptCount val="114"/>
                 <c:pt idx="0">
                   <c:v>05-03</c:v>
                 </c:pt>
@@ -462,333 +462,381 @@
                 </c:pt>
                 <c:pt idx="105">
                   <c:v>05-08</c:v>
+                </c:pt>
+                <c:pt idx="106">
+                  <c:v>05-15</c:v>
+                </c:pt>
+                <c:pt idx="107">
+                  <c:v>05-22</c:v>
+                </c:pt>
+                <c:pt idx="108">
+                  <c:v>05-29</c:v>
+                </c:pt>
+                <c:pt idx="109">
+                  <c:v>06-05</c:v>
+                </c:pt>
+                <c:pt idx="110">
+                  <c:v>06-12</c:v>
+                </c:pt>
+                <c:pt idx="111">
+                  <c:v>06-19</c:v>
+                </c:pt>
+                <c:pt idx="112">
+                  <c:v>06-26</c:v>
+                </c:pt>
+                <c:pt idx="113">
+                  <c:v>07-03</c:v>
                 </c:pt>
               </c:strCache>
             </c:strRef>
           </c:cat>
           <c:val>
             <c:numRef>
-              <c:f>Sheet1!$B$2:$B$107</c:f>
+              <c:f>Sheet1!$B$2:$B$115</c:f>
               <c:numCache>
                 <c:formatCode>General</c:formatCode>
-                <c:ptCount val="106"/>
+                <c:ptCount val="114"/>
                 <c:pt idx="0">
-                  <c:v>129.214948</c:v>
+                  <c:v>98.518275</c:v>
                 </c:pt>
                 <c:pt idx="1">
-                  <c:v>133.884311</c:v>
+                  <c:v>76.55594</c:v>
                 </c:pt>
                 <c:pt idx="2">
-                  <c:v>135.244828</c:v>
+                  <c:v>100.175056</c:v>
                 </c:pt>
                 <c:pt idx="3">
-                  <c:v>137.76811</c:v>
+                  <c:v>70.932738</c:v>
                 </c:pt>
                 <c:pt idx="4">
-                  <c:v>120.296826</c:v>
+                  <c:v>74.195951</c:v>
                 </c:pt>
                 <c:pt idx="5">
-                  <c:v>152.062837</c:v>
+                  <c:v>165.600215</c:v>
                 </c:pt>
                 <c:pt idx="6">
-                  <c:v>152.216347</c:v>
+                  <c:v>128.423488</c:v>
                 </c:pt>
                 <c:pt idx="7">
-                  <c:v>151.002229</c:v>
+                  <c:v>173.904343</c:v>
                 </c:pt>
                 <c:pt idx="8">
-                  <c:v>164.736286</c:v>
+                  <c:v>179.012607</c:v>
                 </c:pt>
                 <c:pt idx="9">
-                  <c:v>111.773016</c:v>
+                  <c:v>87.548362</c:v>
                 </c:pt>
                 <c:pt idx="10">
-                  <c:v>174.140079</c:v>
+                  <c:v>133.277099</c:v>
                 </c:pt>
                 <c:pt idx="11">
-                  <c:v>155.528904</c:v>
+                  <c:v>101.625731</c:v>
                 </c:pt>
                 <c:pt idx="12">
-                  <c:v>169.320108</c:v>
+                  <c:v>162.019995</c:v>
                 </c:pt>
                 <c:pt idx="13">
-                  <c:v>253.506474</c:v>
+                  <c:v>342.63221</c:v>
                 </c:pt>
                 <c:pt idx="14">
-                  <c:v>261.911951</c:v>
+                  <c:v>257.624728</c:v>
                 </c:pt>
                 <c:pt idx="15">
-                  <c:v>267.63878</c:v>
+                  <c:v>280.104206</c:v>
                 </c:pt>
                 <c:pt idx="16">
-                  <c:v>268.491224</c:v>
+                  <c:v>249.219397</c:v>
                 </c:pt>
                 <c:pt idx="17">
-                  <c:v>284.118487</c:v>
+                  <c:v>325.717991</c:v>
                 </c:pt>
                 <c:pt idx="18">
-                  <c:v>319.726648</c:v>
+                  <c:v>255.874789</c:v>
                 </c:pt>
                 <c:pt idx="19">
-                  <c:v>397.335316</c:v>
+                  <c:v>398.446814</c:v>
                 </c:pt>
                 <c:pt idx="20">
-                  <c:v>417.647718</c:v>
+                  <c:v>392.385392</c:v>
                 </c:pt>
                 <c:pt idx="21">
-                  <c:v>403.488534</c:v>
+                  <c:v>328.184556</c:v>
                 </c:pt>
                 <c:pt idx="22">
-                  <c:v>596.247129</c:v>
+                  <c:v>469.81772</c:v>
                 </c:pt>
                 <c:pt idx="23">
-                  <c:v>561.69728</c:v>
+                  <c:v>600.401522</c:v>
                 </c:pt>
                 <c:pt idx="24">
-                  <c:v>627.681274</c:v>
+                  <c:v>569.55037</c:v>
                 </c:pt>
                 <c:pt idx="25">
-                  <c:v>607.716578</c:v>
+                  <c:v>692.608022</c:v>
                 </c:pt>
                 <c:pt idx="26">
-                  <c:v>860.603556</c:v>
+                  <c:v>1016.816809</c:v>
                 </c:pt>
                 <c:pt idx="27">
-                  <c:v>851.395772</c:v>
+                  <c:v>947.772634</c:v>
                 </c:pt>
                 <c:pt idx="28">
-                  <c:v>868.418388</c:v>
+                  <c:v>1027.676316</c:v>
                 </c:pt>
                 <c:pt idx="29">
-                  <c:v>897.889687</c:v>
+                  <c:v>819.24964</c:v>
                 </c:pt>
                 <c:pt idx="30">
-                  <c:v>586.1334</c:v>
+                  <c:v>592.522585</c:v>
                 </c:pt>
                 <c:pt idx="31">
-                  <c:v>1050.32965</c:v>
+                  <c:v>921.654944</c:v>
                 </c:pt>
                 <c:pt idx="32">
-                  <c:v>1014.59217</c:v>
+                  <c:v>680.250843</c:v>
                 </c:pt>
                 <c:pt idx="33">
-                  <c:v>1064.678339</c:v>
+                  <c:v>1096.819854</c:v>
                 </c:pt>
                 <c:pt idx="34">
-                  <c:v>769.105326</c:v>
+                  <c:v>505.803413</c:v>
                 </c:pt>
                 <c:pt idx="35">
-                  <c:v>856.392993</c:v>
+                  <c:v>724.767593</c:v>
                 </c:pt>
                 <c:pt idx="36">
-                  <c:v>1084.134141</c:v>
+                  <c:v>975.043768</c:v>
                 </c:pt>
                 <c:pt idx="37">
-                  <c:v>1145.463734</c:v>
+                  <c:v>1043.340009</c:v>
                 </c:pt>
                 <c:pt idx="38">
-                  <c:v>935.435258</c:v>
+                  <c:v>1046.50234</c:v>
                 </c:pt>
                 <c:pt idx="39">
-                  <c:v>1238.567233</c:v>
+                  <c:v>890.728502</c:v>
                 </c:pt>
                 <c:pt idx="40">
-                  <c:v>1355.034857</c:v>
+                  <c:v>1727.52972</c:v>
                 </c:pt>
                 <c:pt idx="41">
-                  <c:v>1245.116507</c:v>
+                  <c:v>1069.539604</c:v>
                 </c:pt>
                 <c:pt idx="42">
-                  <c:v>1216.418503</c:v>
+                  <c:v>1479.732154</c:v>
                 </c:pt>
                 <c:pt idx="43">
-                  <c:v>1369.620857</c:v>
+                  <c:v>1200.750631</c:v>
                 </c:pt>
                 <c:pt idx="44">
-                  <c:v>1427.71873</c:v>
+                  <c:v>1146.421416</c:v>
                 </c:pt>
                 <c:pt idx="45">
-                  <c:v>1376.462382</c:v>
+                  <c:v>1386.659272</c:v>
                 </c:pt>
                 <c:pt idx="46">
-                  <c:v>1353.087925</c:v>
+                  <c:v>1299.932386</c:v>
                 </c:pt>
                 <c:pt idx="47">
-                  <c:v>1522.051879</c:v>
+                  <c:v>1874.513527</c:v>
                 </c:pt>
                 <c:pt idx="48">
-                  <c:v>1380.399384</c:v>
+                  <c:v>1505.786682</c:v>
                 </c:pt>
                 <c:pt idx="49">
-                  <c:v>1586.186421</c:v>
+                  <c:v>1317.240246</c:v>
                 </c:pt>
                 <c:pt idx="50">
-                  <c:v>1567.812252</c:v>
+                  <c:v>1354.789284</c:v>
                 </c:pt>
                 <c:pt idx="51">
-                  <c:v>1604.473643</c:v>
+                  <c:v>1682.962726</c:v>
                 </c:pt>
                 <c:pt idx="52">
-                  <c:v>1704.791694</c:v>
+                  <c:v>1308.143316</c:v>
                 </c:pt>
                 <c:pt idx="53">
-                  <c:v>1745.905485</c:v>
+                  <c:v>1465.251506</c:v>
                 </c:pt>
                 <c:pt idx="54">
-                  <c:v>1782.309285</c:v>
+                  <c:v>1522.909521</c:v>
                 </c:pt>
                 <c:pt idx="55">
-                  <c:v>1890.210055</c:v>
+                  <c:v>1555.545922</c:v>
                 </c:pt>
                 <c:pt idx="56">
-                  <c:v>1591.71931</c:v>
+                  <c:v>1743.659936</c:v>
                 </c:pt>
                 <c:pt idx="57">
-                  <c:v>1929.739714</c:v>
+                  <c:v>1971.205562</c:v>
                 </c:pt>
                 <c:pt idx="58">
-                  <c:v>1949.28744</c:v>
+                  <c:v>2355.130079</c:v>
                 </c:pt>
                 <c:pt idx="59">
-                  <c:v>1941.504621</c:v>
+                  <c:v>2651.887126</c:v>
                 </c:pt>
                 <c:pt idx="60">
-                  <c:v>2039.130131</c:v>
+                  <c:v>2720.613799</c:v>
                 </c:pt>
                 <c:pt idx="61">
-                  <c:v>1628.031478</c:v>
+                  <c:v>1390.176179</c:v>
                 </c:pt>
                 <c:pt idx="62">
-                  <c:v>2233.778209</c:v>
+                  <c:v>2351.012385</c:v>
                 </c:pt>
                 <c:pt idx="63">
-                  <c:v>2102.589246</c:v>
+                  <c:v>2178.772978</c:v>
                 </c:pt>
                 <c:pt idx="64">
-                  <c:v>2138.984805</c:v>
+                  <c:v>2410.692175</c:v>
                 </c:pt>
                 <c:pt idx="65">
-                  <c:v>2244.352536</c:v>
+                  <c:v>1837.251623</c:v>
                 </c:pt>
                 <c:pt idx="66">
-                  <c:v>2354.170308</c:v>
+                  <c:v>2661.21029</c:v>
                 </c:pt>
                 <c:pt idx="67">
-                  <c:v>2380.110075</c:v>
+                  <c:v>2338.253174</c:v>
                 </c:pt>
                 <c:pt idx="68">
-                  <c:v>2296.415292</c:v>
+                  <c:v>1905.169002</c:v>
                 </c:pt>
                 <c:pt idx="69">
-                  <c:v>2505.135867</c:v>
+                  <c:v>2562.088654</c:v>
                 </c:pt>
                 <c:pt idx="70">
-                  <c:v>1996.780461</c:v>
+                  <c:v>2174.113521</c:v>
                 </c:pt>
                 <c:pt idx="71">
-                  <c:v>2509.277255</c:v>
+                  <c:v>2669.745553</c:v>
                 </c:pt>
                 <c:pt idx="72">
-                  <c:v>2495.053599</c:v>
+                  <c:v>2070.471513</c:v>
                 </c:pt>
                 <c:pt idx="73">
-                  <c:v>2549.875713</c:v>
+                  <c:v>2819.009138</c:v>
                 </c:pt>
                 <c:pt idx="74">
-                  <c:v>2627.08752</c:v>
+                  <c:v>2946.477895</c:v>
                 </c:pt>
                 <c:pt idx="75">
-                  <c:v>2726.594833</c:v>
+                  <c:v>2431.565234</c:v>
                 </c:pt>
                 <c:pt idx="76">
-                  <c:v>2714.555239</c:v>
+                  <c:v>3378.718777</c:v>
                 </c:pt>
                 <c:pt idx="77">
-                  <c:v>2504.677666</c:v>
+                  <c:v>3064.045562</c:v>
                 </c:pt>
                 <c:pt idx="78">
-                  <c:v>2614.6983</c:v>
+                  <c:v>2421.755741</c:v>
                 </c:pt>
                 <c:pt idx="79">
-                  <c:v>2755.418273</c:v>
+                  <c:v>2629.152955</c:v>
                 </c:pt>
                 <c:pt idx="80">
-                  <c:v>2805.041457</c:v>
+                  <c:v>3444.882902</c:v>
                 </c:pt>
                 <c:pt idx="81">
-                  <c:v>2923.216842</c:v>
+                  <c:v>3641.708919</c:v>
                 </c:pt>
                 <c:pt idx="82">
-                  <c:v>1959.454075</c:v>
+                  <c:v>2302.148001</c:v>
                 </c:pt>
                 <c:pt idx="83">
-                  <c:v>3273.642856</c:v>
+                  <c:v>3709.420369</c:v>
                 </c:pt>
                 <c:pt idx="84">
-                  <c:v>3163.152057</c:v>
+                  <c:v>2684.070718</c:v>
                 </c:pt>
                 <c:pt idx="85">
-                  <c:v>3172.054543</c:v>
+                  <c:v>4326.483434</c:v>
                 </c:pt>
                 <c:pt idx="86">
-                  <c:v>2029.164421</c:v>
+                  <c:v>2495.013225</c:v>
                 </c:pt>
                 <c:pt idx="87">
-                  <c:v>2271.700805</c:v>
+                  <c:v>2188.047341</c:v>
                 </c:pt>
                 <c:pt idx="88">
-                  <c:v>3255.517144</c:v>
+                  <c:v>2071.430111</c:v>
                 </c:pt>
                 <c:pt idx="89">
-                  <c:v>3076.766229</c:v>
+                  <c:v>2618.95266</c:v>
                 </c:pt>
                 <c:pt idx="90">
-                  <c:v>2525.336242</c:v>
+                  <c:v>2350.642882</c:v>
                 </c:pt>
                 <c:pt idx="91">
-                  <c:v>2525.086227</c:v>
+                  <c:v>2106.769535</c:v>
                 </c:pt>
                 <c:pt idx="92">
-                  <c:v>3316.063546</c:v>
+                  <c:v>3277.725496</c:v>
                 </c:pt>
                 <c:pt idx="93">
-                  <c:v>3101.782118</c:v>
+                  <c:v>2943.522489</c:v>
                 </c:pt>
                 <c:pt idx="94">
-                  <c:v>3000.136915</c:v>
+                  <c:v>2541.643796</c:v>
                 </c:pt>
                 <c:pt idx="95">
-                  <c:v>2974.262732</c:v>
+                  <c:v>3070.539311</c:v>
                 </c:pt>
                 <c:pt idx="96">
-                  <c:v>3242.186399</c:v>
+                  <c:v>2760.582366</c:v>
                 </c:pt>
                 <c:pt idx="97">
-                  <c:v>3128.526749</c:v>
+                  <c:v>3986.449051</c:v>
                 </c:pt>
                 <c:pt idx="98">
-                  <c:v>3058.346317</c:v>
+                  <c:v>4051.274766</c:v>
                 </c:pt>
                 <c:pt idx="99">
-                  <c:v>3258.957354</c:v>
+                  <c:v>3709.936336</c:v>
                 </c:pt>
                 <c:pt idx="100">
-                  <c:v>3328.79895</c:v>
+                  <c:v>3682.944656</c:v>
                 </c:pt>
                 <c:pt idx="101">
-                  <c:v>3210.787863</c:v>
+                  <c:v>2842.772457</c:v>
                 </c:pt>
                 <c:pt idx="102">
-                  <c:v>3009.430062</c:v>
+                  <c:v>2555.312527</c:v>
                 </c:pt>
                 <c:pt idx="103">
-                  <c:v>3148.8446</c:v>
+                  <c:v>3057.454309</c:v>
                 </c:pt>
                 <c:pt idx="104">
-                  <c:v>3426.530867</c:v>
+                  <c:v>3801.74134</c:v>
                 </c:pt>
                 <c:pt idx="105">
-                  <c:v>3621.582263</c:v>
+                  <c:v>2549.138823</c:v>
+                </c:pt>
+                <c:pt idx="106">
+                  <c:v>3567.584279</c:v>
+                </c:pt>
+                <c:pt idx="107">
+                  <c:v>3853.365952</c:v>
+                </c:pt>
+                <c:pt idx="108">
+                  <c:v>3018.377542</c:v>
+                </c:pt>
+                <c:pt idx="109">
+                  <c:v>4230.40296</c:v>
+                </c:pt>
+                <c:pt idx="110">
+                  <c:v>4072.738769</c:v>
+                </c:pt>
+                <c:pt idx="111">
+                  <c:v>3397.467411</c:v>
+                </c:pt>
+                <c:pt idx="112">
+                  <c:v>4197.913442</c:v>
+                </c:pt>
+                <c:pt idx="113">
+                  <c:v>3554.900091</c:v>
                 </c:pt>
               </c:numCache>
             </c:numRef>
@@ -821,9 +869,9 @@
           </c:marker>
           <c:cat>
             <c:strRef>
-              <c:f>Sheet1!$A$2:$A$107</c:f>
+              <c:f>Sheet1!$A$2:$A$115</c:f>
               <c:strCache>
-                <c:ptCount val="106"/>
+                <c:ptCount val="114"/>
                 <c:pt idx="0">
                   <c:v>05-03</c:v>
                 </c:pt>
@@ -1141,333 +1189,381 @@
                 </c:pt>
                 <c:pt idx="105">
                   <c:v>05-08</c:v>
+                </c:pt>
+                <c:pt idx="106">
+                  <c:v>05-15</c:v>
+                </c:pt>
+                <c:pt idx="107">
+                  <c:v>05-22</c:v>
+                </c:pt>
+                <c:pt idx="108">
+                  <c:v>05-29</c:v>
+                </c:pt>
+                <c:pt idx="109">
+                  <c:v>06-05</c:v>
+                </c:pt>
+                <c:pt idx="110">
+                  <c:v>06-12</c:v>
+                </c:pt>
+                <c:pt idx="111">
+                  <c:v>06-19</c:v>
+                </c:pt>
+                <c:pt idx="112">
+                  <c:v>06-26</c:v>
+                </c:pt>
+                <c:pt idx="113">
+                  <c:v>07-03</c:v>
                 </c:pt>
               </c:strCache>
             </c:strRef>
           </c:cat>
           <c:val>
             <c:numRef>
-              <c:f>Sheet1!$C$2:$C$107</c:f>
+              <c:f>Sheet1!$C$2:$C$115</c:f>
               <c:numCache>
                 <c:formatCode>General</c:formatCode>
-                <c:ptCount val="106"/>
+                <c:ptCount val="114"/>
                 <c:pt idx="0">
-                  <c:v>3526.895728</c:v>
+                  <c:v>4191.397261</c:v>
                 </c:pt>
                 <c:pt idx="1">
-                  <c:v>3654.345036</c:v>
+                  <c:v>3257.023716</c:v>
                 </c:pt>
                 <c:pt idx="2">
-                  <c:v>3691.480062</c:v>
+                  <c:v>4261.883961</c:v>
                 </c:pt>
                 <c:pt idx="3">
-                  <c:v>3760.35253</c:v>
+                  <c:v>3017.788157</c:v>
                 </c:pt>
                 <c:pt idx="4">
-                  <c:v>3283.477404</c:v>
+                  <c:v>3156.619474</c:v>
                 </c:pt>
                 <c:pt idx="5">
-                  <c:v>4054.470441</c:v>
+                  <c:v>4725.902365</c:v>
                 </c:pt>
                 <c:pt idx="6">
-                  <c:v>4058.563488</c:v>
+                  <c:v>3664.952164</c:v>
                 </c:pt>
                 <c:pt idx="7">
-                  <c:v>4026.1913</c:v>
+                  <c:v>4962.885736</c:v>
                 </c:pt>
                 <c:pt idx="8">
-                  <c:v>4392.384182</c:v>
+                  <c:v>5108.665487</c:v>
                 </c:pt>
                 <c:pt idx="9">
-                  <c:v>3001.495599</c:v>
+                  <c:v>2932.127951</c:v>
                 </c:pt>
                 <c:pt idx="10">
-                  <c:v>4676.268915</c:v>
+                  <c:v>4463.652993</c:v>
                 </c:pt>
                 <c:pt idx="11">
-                  <c:v>4176.4939</c:v>
+                  <c:v>3403.600491</c:v>
                 </c:pt>
                 <c:pt idx="12">
-                  <c:v>4546.835877</c:v>
+                  <c:v>5426.296345</c:v>
                 </c:pt>
                 <c:pt idx="13">
-                  <c:v>4242.977044</c:v>
+                  <c:v>4684.433855</c:v>
                 </c:pt>
                 <c:pt idx="14">
-                  <c:v>4383.660812</c:v>
+                  <c:v>3522.219926</c:v>
                 </c:pt>
                 <c:pt idx="15">
-                  <c:v>4479.511642</c:v>
+                  <c:v>3829.55714</c:v>
                 </c:pt>
                 <c:pt idx="16">
-                  <c:v>4493.779122</c:v>
+                  <c:v>3407.303069</c:v>
                 </c:pt>
                 <c:pt idx="17">
-                  <c:v>4755.335043</c:v>
+                  <c:v>4453.184323</c:v>
                 </c:pt>
                 <c:pt idx="18">
-                  <c:v>3857.25063</c:v>
+                  <c:v>3534.436586</c:v>
                 </c:pt>
                 <c:pt idx="19">
-                  <c:v>4793.538192</c:v>
+                  <c:v>5503.805205</c:v>
                 </c:pt>
                 <c:pt idx="20">
-                  <c:v>5038.591352</c:v>
+                  <c:v>5420.077889</c:v>
                 </c:pt>
                 <c:pt idx="21">
-                  <c:v>4867.771932</c:v>
+                  <c:v>4533.262174</c:v>
                 </c:pt>
                 <c:pt idx="22">
-                  <c:v>4730.946974</c:v>
+                  <c:v>3844.689639</c:v>
                 </c:pt>
                 <c:pt idx="23">
-                  <c:v>4456.809797</c:v>
+                  <c:v>4913.304477</c:v>
                 </c:pt>
                 <c:pt idx="24">
-                  <c:v>4980.362468</c:v>
+                  <c:v>4660.838257</c:v>
                 </c:pt>
                 <c:pt idx="25">
-                  <c:v>4821.951777</c:v>
+                  <c:v>5667.863876</c:v>
                 </c:pt>
                 <c:pt idx="26">
-                  <c:v>5381.880619</c:v>
+                  <c:v>6754.954786</c:v>
                 </c:pt>
                 <c:pt idx="27">
-                  <c:v>5324.298714</c:v>
+                  <c:v>6296.277984</c:v>
                 </c:pt>
                 <c:pt idx="28">
-                  <c:v>5430.751548</c:v>
+                  <c:v>6827.097064</c:v>
                 </c:pt>
                 <c:pt idx="29">
-                  <c:v>5615.053617</c:v>
+                  <c:v>5442.469311</c:v>
                 </c:pt>
                 <c:pt idx="30">
-                  <c:v>3665.450796</c:v>
+                  <c:v>3936.267811</c:v>
                 </c:pt>
                 <c:pt idx="31">
-                  <c:v>6245.61052</c:v>
+                  <c:v>6464.706163</c:v>
                 </c:pt>
                 <c:pt idx="32">
-                  <c:v>6033.10354</c:v>
+                  <c:v>4771.440594</c:v>
                 </c:pt>
                 <c:pt idx="33">
-                  <c:v>6330.932613</c:v>
+                  <c:v>7693.354343</c:v>
                 </c:pt>
                 <c:pt idx="34">
-                  <c:v>4573.356868</c:v>
+                  <c:v>3547.824991</c:v>
                 </c:pt>
                 <c:pt idx="35">
-                  <c:v>4599.737406</c:v>
+                  <c:v>4323.247236</c:v>
                 </c:pt>
                 <c:pt idx="36">
-                  <c:v>5822.948578</c:v>
+                  <c:v>5816.147564</c:v>
                 </c:pt>
                 <c:pt idx="37">
-                  <c:v>6152.353448</c:v>
+                  <c:v>6223.53545</c:v>
                 </c:pt>
                 <c:pt idx="38">
-                  <c:v>5024.278088</c:v>
+                  <c:v>6242.398789</c:v>
                 </c:pt>
                 <c:pt idx="39">
-                  <c:v>6652.417848</c:v>
+                  <c:v>5313.206011</c:v>
                 </c:pt>
                 <c:pt idx="40">
-                  <c:v>6691.228986</c:v>
+                  <c:v>8267.566044</c:v>
                 </c:pt>
                 <c:pt idx="41">
-                  <c:v>6148.446746</c:v>
+                  <c:v>5118.574353</c:v>
                 </c:pt>
                 <c:pt idx="42">
-                  <c:v>6006.73459</c:v>
+                  <c:v>7081.663008</c:v>
                 </c:pt>
                 <c:pt idx="43">
-                  <c:v>6763.255375</c:v>
+                  <c:v>5746.520612</c:v>
                 </c:pt>
                 <c:pt idx="44">
-                  <c:v>6866.716282</c:v>
+                  <c:v>5270.282421</c:v>
                 </c:pt>
                 <c:pt idx="45">
-                  <c:v>6620.195173</c:v>
+                  <c:v>6374.694232</c:v>
                 </c:pt>
                 <c:pt idx="46">
-                  <c:v>6507.774039</c:v>
+                  <c:v>5975.996879</c:v>
                 </c:pt>
                 <c:pt idx="47">
-                  <c:v>7320.418369</c:v>
+                  <c:v>8617.43819</c:v>
                 </c:pt>
                 <c:pt idx="48">
-                  <c:v>6380.341714</c:v>
+                  <c:v>7162.402725</c:v>
                 </c:pt>
                 <c:pt idx="49">
-                  <c:v>7331.509639</c:v>
+                  <c:v>6265.56553</c:v>
                 </c:pt>
                 <c:pt idx="50">
-                  <c:v>7246.582423</c:v>
+                  <c:v>6444.170729</c:v>
                 </c:pt>
                 <c:pt idx="51">
-                  <c:v>7416.034979</c:v>
+                  <c:v>8005.155684</c:v>
                 </c:pt>
                 <c:pt idx="52">
-                  <c:v>7248.794071</c:v>
+                  <c:v>5415.573148</c:v>
                 </c:pt>
                 <c:pt idx="53">
-                  <c:v>7423.610391</c:v>
+                  <c:v>6065.984219</c:v>
                 </c:pt>
                 <c:pt idx="54">
-                  <c:v>7578.399768</c:v>
+                  <c:v>6304.682222</c:v>
                 </c:pt>
                 <c:pt idx="55">
-                  <c:v>8037.195097</c:v>
+                  <c:v>6439.793426</c:v>
                 </c:pt>
                 <c:pt idx="56">
-                  <c:v>6768.008984</c:v>
+                  <c:v>7218.565287</c:v>
                 </c:pt>
                 <c:pt idx="57">
-                  <c:v>8219.325013</c:v>
+                  <c:v>7335.286501</c:v>
                 </c:pt>
                 <c:pt idx="58">
-                  <c:v>8302.584487</c:v>
+                  <c:v>8763.953496</c:v>
                 </c:pt>
                 <c:pt idx="59">
-                  <c:v>8269.435187</c:v>
+                  <c:v>9868.251295</c:v>
                 </c:pt>
                 <c:pt idx="60">
-                  <c:v>8685.250746</c:v>
+                  <c:v>10123.998258</c:v>
                 </c:pt>
                 <c:pt idx="61">
-                  <c:v>6315.817702</c:v>
+                  <c:v>6083.235974</c:v>
                 </c:pt>
                 <c:pt idx="62">
-                  <c:v>8665.763621</c:v>
+                  <c:v>10287.734272</c:v>
                 </c:pt>
                 <c:pt idx="63">
-                  <c:v>8156.826552</c:v>
+                  <c:v>9534.036303</c:v>
                 </c:pt>
                 <c:pt idx="64">
-                  <c:v>8298.020205</c:v>
+                  <c:v>10548.885519</c:v>
                 </c:pt>
                 <c:pt idx="65">
-                  <c:v>8479.06155</c:v>
+                  <c:v>7555.68934</c:v>
                 </c:pt>
                 <c:pt idx="66">
-                  <c:v>8893.948086</c:v>
+                  <c:v>10944.215786</c:v>
                 </c:pt>
                 <c:pt idx="67">
-                  <c:v>8991.947342</c:v>
+                  <c:v>9616.056048</c:v>
                 </c:pt>
                 <c:pt idx="68">
-                  <c:v>8675.75227</c:v>
+                  <c:v>7834.999265</c:v>
                 </c:pt>
                 <c:pt idx="69">
-                  <c:v>9464.289085</c:v>
+                  <c:v>10536.578486</c:v>
                 </c:pt>
                 <c:pt idx="70">
-                  <c:v>7247.464162</c:v>
+                  <c:v>7991.465741</c:v>
                 </c:pt>
                 <c:pt idx="71">
-                  <c:v>9107.609643</c:v>
+                  <c:v>9813.277882</c:v>
                 </c:pt>
                 <c:pt idx="72">
-                  <c:v>9055.983818</c:v>
+                  <c:v>7610.505158</c:v>
                 </c:pt>
                 <c:pt idx="73">
-                  <c:v>9254.964783</c:v>
+                  <c:v>10361.931305</c:v>
                 </c:pt>
                 <c:pt idx="74">
-                  <c:v>9295.265297</c:v>
+                  <c:v>9581.069254</c:v>
                 </c:pt>
                 <c:pt idx="75">
-                  <c:v>9647.346016</c:v>
+                  <c:v>7906.726516</c:v>
                 </c:pt>
                 <c:pt idx="76">
-                  <c:v>9604.747049</c:v>
+                  <c:v>10986.58797</c:v>
                 </c:pt>
                 <c:pt idx="77">
-                  <c:v>8862.149895</c:v>
+                  <c:v>9963.364318</c:v>
                 </c:pt>
                 <c:pt idx="78">
-                  <c:v>9251.429264</c:v>
+                  <c:v>7874.828965</c:v>
                 </c:pt>
                 <c:pt idx="79">
-                  <c:v>9934.066708</c:v>
+                  <c:v>7398.091079</c:v>
                 </c:pt>
                 <c:pt idx="80">
-                  <c:v>10112.972405</c:v>
+                  <c:v>9693.448003</c:v>
                 </c:pt>
                 <c:pt idx="81">
-                  <c:v>10539.028282</c:v>
+                  <c:v>10247.290561</c:v>
                 </c:pt>
                 <c:pt idx="82">
-                  <c:v>7064.389349</c:v>
+                  <c:v>6477.94209</c:v>
                 </c:pt>
                 <c:pt idx="83">
-                  <c:v>11282.887066</c:v>
+                  <c:v>10983.373964</c:v>
                 </c:pt>
                 <c:pt idx="84">
-                  <c:v>10902.071182</c:v>
+                  <c:v>7947.374391</c:v>
                 </c:pt>
                 <c:pt idx="85">
-                  <c:v>10932.754353</c:v>
+                  <c:v>12810.461145</c:v>
                 </c:pt>
                 <c:pt idx="86">
-                  <c:v>6993.686853</c:v>
+                  <c:v>7387.586353</c:v>
                 </c:pt>
                 <c:pt idx="87">
-                  <c:v>7948.157522</c:v>
+                  <c:v>10360.741989</c:v>
                 </c:pt>
                 <c:pt idx="88">
-                  <c:v>11390.304134</c:v>
+                  <c:v>9808.541404</c:v>
                 </c:pt>
                 <c:pt idx="89">
-                  <c:v>10764.895881</c:v>
+                  <c:v>12401.145208</c:v>
                 </c:pt>
                 <c:pt idx="90">
-                  <c:v>8835.569456</c:v>
+                  <c:v>11130.656982</c:v>
                 </c:pt>
                 <c:pt idx="91">
-                  <c:v>8834.694708</c:v>
+                  <c:v>9975.879033</c:v>
                 </c:pt>
                 <c:pt idx="92">
-                  <c:v>11053.950671</c:v>
+                  <c:v>11403.770237</c:v>
                 </c:pt>
                 <c:pt idx="93">
-                  <c:v>10339.653041</c:v>
+                  <c:v>10241.020548</c:v>
                 </c:pt>
                 <c:pt idx="94">
-                  <c:v>10000.823267</c:v>
+                  <c:v>8842.815518</c:v>
                 </c:pt>
                 <c:pt idx="95">
-                  <c:v>9914.572824</c:v>
+                  <c:v>10682.933898</c:v>
                 </c:pt>
                 <c:pt idx="96">
-                  <c:v>10716.333246</c:v>
+                  <c:v>8328.953685</c:v>
                 </c:pt>
                 <c:pt idx="97">
-                  <c:v>10340.656299</c:v>
+                  <c:v>12027.516338</c:v>
                 </c:pt>
                 <c:pt idx="98">
-                  <c:v>10108.690336</c:v>
+                  <c:v>12223.102017</c:v>
                 </c:pt>
                 <c:pt idx="99">
-                  <c:v>10771.765947</c:v>
+                  <c:v>11193.249762</c:v>
                 </c:pt>
                 <c:pt idx="100">
-                  <c:v>11061.675471</c:v>
+                  <c:v>13897.27726</c:v>
                 </c:pt>
                 <c:pt idx="101">
-                  <c:v>10669.521911</c:v>
+                  <c:v>10726.959192</c:v>
                 </c:pt>
                 <c:pt idx="102">
-                  <c:v>10000.405308</c:v>
+                  <c:v>9642.253685</c:v>
                 </c:pt>
                 <c:pt idx="103">
-                  <c:v>10463.683026</c:v>
+                  <c:v>11537.042834</c:v>
                 </c:pt>
                 <c:pt idx="104">
-                  <c:v>11386.440876</c:v>
+                  <c:v>14591.088722</c:v>
                 </c:pt>
                 <c:pt idx="105">
-                  <c:v>12034.60115</c:v>
+                  <c:v>9783.598465</c:v>
+                </c:pt>
+                <c:pt idx="106">
+                  <c:v>13692.393586</c:v>
+                </c:pt>
+                <c:pt idx="107">
+                  <c:v>14789.224058</c:v>
+                </c:pt>
+                <c:pt idx="108">
+                  <c:v>11584.537341</c:v>
+                </c:pt>
+                <c:pt idx="109">
+                  <c:v>14467.133164</c:v>
+                </c:pt>
+                <c:pt idx="110">
+                  <c:v>13927.953123</c:v>
+                </c:pt>
+                <c:pt idx="111">
+                  <c:v>11618.659954</c:v>
+                </c:pt>
+                <c:pt idx="112">
+                  <c:v>14356.025504</c:v>
+                </c:pt>
+                <c:pt idx="113">
+                  <c:v>12157.048275</c:v>
                 </c:pt>
               </c:numCache>
             </c:numRef>
@@ -1516,8 +1612,8 @@
         <c:lblAlgn val="ctr"/>
         <c:lblOffset val="100"/>
         <c:noMultiLvlLbl val="0"/>
-        <c:tickLblSkip val="11"/>
-        <c:tickMarkSkip val="11"/>
+        <c:tickLblSkip val="12"/>
+        <c:tickMarkSkip val="12"/>
       </c:catAx>
       <c:valAx>
         <c:axId val="2140495176"/>
@@ -4809,7 +4905,7 @@
                 </a:solidFill>
                 <a:latin typeface="Roboto"/>
               </a:rPr>
-              <a:t>Skyrizi's weekly IBD volume has scaled from ~3,656 to ~15,656 TRx since May 2024. Crohn's has led in every week; ulcerative colitis has grown from ~4% to ~23% of the mix since its 2024 launch.</a:t>
+              <a:t>Skyrizi's weekly IBD volume has scaled from ~4,290 to ~15,712 TRx since May 2024. Crohn's has led in every week; ulcerative colitis has grown from ~2% to ~23% of the mix since its 2024 launch.</a:t>
             </a:r>
           </a:p>
         </p:txBody>
@@ -4983,7 +5079,7 @@
                 </a:solidFill>
                 <a:latin typeface="Roboto"/>
               </a:rPr>
-              <a:t>CD ~12,035 vs UC ~3,622 TRx in the latest week (05-08) — about a 77/23 CD/UC split.</a:t>
+              <a:t>CD ~12,157 vs UC ~3,555 TRx in the latest week (07-03) — about a 77/23 CD/UC split.</a:t>
             </a:r>
           </a:p>
         </p:txBody>
@@ -5100,7 +5196,7 @@
                 </a:solidFill>
                 <a:latin typeface="Roboto"/>
               </a:rPr>
-              <a:t>Ulcerative colitis has risen from ~4% to ~23% of Skyrizi's IBD mix since its 2024 launch.</a:t>
+              <a:t>Ulcerative colitis has risen from ~2% to ~23% of Skyrizi's IBD mix since its 2024 launch.</a:t>
             </a:r>
           </a:p>
         </p:txBody>
@@ -5217,7 +5313,7 @@
                 </a:solidFill>
                 <a:latin typeface="Roboto"/>
               </a:rPr>
-              <a:t>Skyrizi's IBD volume rose from ~3,656 to ~15,656 weekly TRx (OBI maintenance is ~99.9% of it).</a:t>
+              <a:t>Skyrizi's IBD volume rose from ~4,290 to ~15,712 weekly TRx (OBI maintenance is ~99.9% of it).</a:t>
             </a:r>
           </a:p>
         </p:txBody>
